--- a/set/2026-08-02 El Camino Baptist Church-CH.pptx
+++ b/set/2026-08-02 El Camino Baptist Church-CH.pptx
@@ -18,30 +18,29 @@
     <p:sldId id="291" r:id="rId12"/>
     <p:sldId id="277" r:id="rId13"/>
     <p:sldId id="278" r:id="rId14"/>
-    <p:sldId id="279" r:id="rId15"/>
-    <p:sldId id="261" r:id="rId16"/>
-    <p:sldId id="292" r:id="rId17"/>
-    <p:sldId id="265" r:id="rId18"/>
-    <p:sldId id="293" r:id="rId19"/>
-    <p:sldId id="294" r:id="rId20"/>
-    <p:sldId id="295" r:id="rId21"/>
-    <p:sldId id="280" r:id="rId22"/>
-    <p:sldId id="296" r:id="rId23"/>
-    <p:sldId id="281" r:id="rId24"/>
-    <p:sldId id="297" r:id="rId25"/>
-    <p:sldId id="274" r:id="rId26"/>
-    <p:sldId id="258" r:id="rId27"/>
-    <p:sldId id="260" r:id="rId28"/>
-    <p:sldId id="298" r:id="rId29"/>
-    <p:sldId id="299" r:id="rId30"/>
-    <p:sldId id="300" r:id="rId31"/>
-    <p:sldId id="270" r:id="rId32"/>
-    <p:sldId id="301" r:id="rId33"/>
-    <p:sldId id="302" r:id="rId34"/>
-    <p:sldId id="303" r:id="rId35"/>
-    <p:sldId id="304" r:id="rId36"/>
-    <p:sldId id="305" r:id="rId37"/>
-    <p:sldId id="306" r:id="rId38"/>
+    <p:sldId id="261" r:id="rId15"/>
+    <p:sldId id="292" r:id="rId16"/>
+    <p:sldId id="265" r:id="rId17"/>
+    <p:sldId id="293" r:id="rId18"/>
+    <p:sldId id="294" r:id="rId19"/>
+    <p:sldId id="295" r:id="rId20"/>
+    <p:sldId id="280" r:id="rId21"/>
+    <p:sldId id="296" r:id="rId22"/>
+    <p:sldId id="281" r:id="rId23"/>
+    <p:sldId id="297" r:id="rId24"/>
+    <p:sldId id="274" r:id="rId25"/>
+    <p:sldId id="258" r:id="rId26"/>
+    <p:sldId id="260" r:id="rId27"/>
+    <p:sldId id="298" r:id="rId28"/>
+    <p:sldId id="299" r:id="rId29"/>
+    <p:sldId id="300" r:id="rId30"/>
+    <p:sldId id="270" r:id="rId31"/>
+    <p:sldId id="301" r:id="rId32"/>
+    <p:sldId id="302" r:id="rId33"/>
+    <p:sldId id="303" r:id="rId34"/>
+    <p:sldId id="304" r:id="rId35"/>
+    <p:sldId id="305" r:id="rId36"/>
+    <p:sldId id="306" r:id="rId37"/>
   </p:sldIdLst>
   <p:sldSz cx="12192000" cy="6858000"/>
   <p:notesSz cx="6858000" cy="9144000"/>
@@ -295,7 +294,7 @@
           <a:p>
             <a:fld id="{E759A0DE-F190-5444-87AC-4719D5F20D15}" type="datetimeFigureOut">
               <a:rPr lang="en-US" smtClean="0"/>
-              <a:t>8/1/26</a:t>
+              <a:t>8/2/26</a:t>
             </a:fld>
             <a:endParaRPr lang="en-US"/>
           </a:p>
@@ -493,7 +492,7 @@
           <a:p>
             <a:fld id="{E759A0DE-F190-5444-87AC-4719D5F20D15}" type="datetimeFigureOut">
               <a:rPr lang="en-US" smtClean="0"/>
-              <a:t>8/1/26</a:t>
+              <a:t>8/2/26</a:t>
             </a:fld>
             <a:endParaRPr lang="en-US"/>
           </a:p>
@@ -701,7 +700,7 @@
           <a:p>
             <a:fld id="{E759A0DE-F190-5444-87AC-4719D5F20D15}" type="datetimeFigureOut">
               <a:rPr lang="en-US" smtClean="0"/>
-              <a:t>8/1/26</a:t>
+              <a:t>8/2/26</a:t>
             </a:fld>
             <a:endParaRPr lang="en-US"/>
           </a:p>
@@ -899,7 +898,7 @@
           <a:p>
             <a:fld id="{E759A0DE-F190-5444-87AC-4719D5F20D15}" type="datetimeFigureOut">
               <a:rPr lang="en-US" smtClean="0"/>
-              <a:t>8/1/26</a:t>
+              <a:t>8/2/26</a:t>
             </a:fld>
             <a:endParaRPr lang="en-US"/>
           </a:p>
@@ -1174,7 +1173,7 @@
           <a:p>
             <a:fld id="{E759A0DE-F190-5444-87AC-4719D5F20D15}" type="datetimeFigureOut">
               <a:rPr lang="en-US" smtClean="0"/>
-              <a:t>8/1/26</a:t>
+              <a:t>8/2/26</a:t>
             </a:fld>
             <a:endParaRPr lang="en-US"/>
           </a:p>
@@ -1439,7 +1438,7 @@
           <a:p>
             <a:fld id="{E759A0DE-F190-5444-87AC-4719D5F20D15}" type="datetimeFigureOut">
               <a:rPr lang="en-US" smtClean="0"/>
-              <a:t>8/1/26</a:t>
+              <a:t>8/2/26</a:t>
             </a:fld>
             <a:endParaRPr lang="en-US"/>
           </a:p>
@@ -1851,7 +1850,7 @@
           <a:p>
             <a:fld id="{E759A0DE-F190-5444-87AC-4719D5F20D15}" type="datetimeFigureOut">
               <a:rPr lang="en-US" smtClean="0"/>
-              <a:t>8/1/26</a:t>
+              <a:t>8/2/26</a:t>
             </a:fld>
             <a:endParaRPr lang="en-US"/>
           </a:p>
@@ -1992,7 +1991,7 @@
           <a:p>
             <a:fld id="{E759A0DE-F190-5444-87AC-4719D5F20D15}" type="datetimeFigureOut">
               <a:rPr lang="en-US" smtClean="0"/>
-              <a:t>8/1/26</a:t>
+              <a:t>8/2/26</a:t>
             </a:fld>
             <a:endParaRPr lang="en-US"/>
           </a:p>
@@ -2105,7 +2104,7 @@
           <a:p>
             <a:fld id="{E759A0DE-F190-5444-87AC-4719D5F20D15}" type="datetimeFigureOut">
               <a:rPr lang="en-US" smtClean="0"/>
-              <a:t>8/1/26</a:t>
+              <a:t>8/2/26</a:t>
             </a:fld>
             <a:endParaRPr lang="en-US"/>
           </a:p>
@@ -2416,7 +2415,7 @@
           <a:p>
             <a:fld id="{E759A0DE-F190-5444-87AC-4719D5F20D15}" type="datetimeFigureOut">
               <a:rPr lang="en-US" smtClean="0"/>
-              <a:t>8/1/26</a:t>
+              <a:t>8/2/26</a:t>
             </a:fld>
             <a:endParaRPr lang="en-US"/>
           </a:p>
@@ -2704,7 +2703,7 @@
           <a:p>
             <a:fld id="{E759A0DE-F190-5444-87AC-4719D5F20D15}" type="datetimeFigureOut">
               <a:rPr lang="en-US" smtClean="0"/>
-              <a:t>8/1/26</a:t>
+              <a:t>8/2/26</a:t>
             </a:fld>
             <a:endParaRPr lang="en-US"/>
           </a:p>
@@ -2945,7 +2944,7 @@
           <a:p>
             <a:fld id="{E759A0DE-F190-5444-87AC-4719D5F20D15}" type="datetimeFigureOut">
               <a:rPr lang="en-US" smtClean="0"/>
-              <a:t>8/1/26</a:t>
+              <a:t>8/2/26</a:t>
             </a:fld>
             <a:endParaRPr lang="en-US"/>
           </a:p>
@@ -4521,7 +4520,7 @@
         <p:spPr>
           <a:xfrm>
             <a:off x="682831" y="497702"/>
-            <a:ext cx="10826338" cy="5862596"/>
+            <a:ext cx="8341899" cy="5862596"/>
           </a:xfrm>
         </p:spPr>
         <p:txBody>
@@ -4641,6 +4640,45 @@
                 <a:ea typeface="Bodoni Ornaments" pitchFamily="2" charset="0"/>
               </a:rPr>
               <a:t>And I will rise on Eagles Wings </a:t>
+            </a:r>
+          </a:p>
+        </p:txBody>
+      </p:sp>
+      <p:sp>
+        <p:nvSpPr>
+          <p:cNvPr id="2" name="TextBox 1">
+            <a:extLst>
+              <a:ext uri="{FF2B5EF4-FFF2-40B4-BE49-F238E27FC236}">
+                <a16:creationId xmlns:a16="http://schemas.microsoft.com/office/drawing/2014/main" id="{405B9499-3F3E-7934-C5DD-2859457C070E}"/>
+              </a:ext>
+            </a:extLst>
+          </p:cNvPr>
+          <p:cNvSpPr txBox="1"/>
+          <p:nvPr/>
+        </p:nvSpPr>
+        <p:spPr>
+          <a:xfrm>
+            <a:off x="9978887" y="5975577"/>
+            <a:ext cx="2010487" cy="769441"/>
+          </a:xfrm>
+          <a:prstGeom prst="rect">
+            <a:avLst/>
+          </a:prstGeom>
+          <a:noFill/>
+        </p:spPr>
+        <p:txBody>
+          <a:bodyPr wrap="none" rtlCol="0">
+            <a:spAutoFit/>
+          </a:bodyPr>
+          <a:lstStyle/>
+          <a:p>
+            <a:r>
+              <a:rPr lang="en-US" sz="4400" b="1" dirty="0">
+                <a:solidFill>
+                  <a:schemeClr val="bg1"/>
+                </a:solidFill>
+              </a:rPr>
+              <a:t>x2 END</a:t>
             </a:r>
           </a:p>
         </p:txBody>
@@ -4659,195 +4697,6 @@
 </file>
 
 <file path=ppt/slides/slide14.xml><?xml version="1.0" encoding="utf-8"?>
-<p:sld xmlns:a="http://schemas.openxmlformats.org/drawingml/2006/main" xmlns:r="http://schemas.openxmlformats.org/officeDocument/2006/relationships" xmlns:p="http://schemas.openxmlformats.org/presentationml/2006/main">
-  <p:cSld>
-    <p:bg>
-      <p:bgPr>
-        <a:solidFill>
-          <a:schemeClr val="accent5">
-            <a:lumMod val="50000"/>
-          </a:schemeClr>
-        </a:solidFill>
-        <a:effectLst/>
-      </p:bgPr>
-    </p:bg>
-    <p:spTree>
-      <p:nvGrpSpPr>
-        <p:cNvPr id="1" name="">
-          <a:extLst>
-            <a:ext uri="{FF2B5EF4-FFF2-40B4-BE49-F238E27FC236}">
-              <a16:creationId xmlns:a16="http://schemas.microsoft.com/office/drawing/2014/main" id="{0AA19105-D6B9-F07D-A874-F3D0465EE2BE}"/>
-            </a:ext>
-          </a:extLst>
-        </p:cNvPr>
-        <p:cNvGrpSpPr/>
-        <p:nvPr/>
-      </p:nvGrpSpPr>
-      <p:grpSpPr>
-        <a:xfrm>
-          <a:off x="0" y="0"/>
-          <a:ext cx="0" cy="0"/>
-          <a:chOff x="0" y="0"/>
-          <a:chExt cx="0" cy="0"/>
-        </a:xfrm>
-      </p:grpSpPr>
-      <p:sp>
-        <p:nvSpPr>
-          <p:cNvPr id="3" name="Subtitle 2">
-            <a:extLst>
-              <a:ext uri="{FF2B5EF4-FFF2-40B4-BE49-F238E27FC236}">
-                <a16:creationId xmlns:a16="http://schemas.microsoft.com/office/drawing/2014/main" id="{3E9A8A34-AC28-EEC6-5C7D-913D36AB1953}"/>
-              </a:ext>
-            </a:extLst>
-          </p:cNvPr>
-          <p:cNvSpPr>
-            <a:spLocks noGrp="1"/>
-          </p:cNvSpPr>
-          <p:nvPr>
-            <p:ph type="subTitle" idx="1"/>
-          </p:nvPr>
-        </p:nvSpPr>
-        <p:spPr>
-          <a:xfrm>
-            <a:off x="682831" y="497702"/>
-            <a:ext cx="10826338" cy="5862596"/>
-          </a:xfrm>
-        </p:spPr>
-        <p:txBody>
-          <a:bodyPr>
-            <a:noAutofit/>
-          </a:bodyPr>
-          <a:lstStyle/>
-          <a:p>
-            <a:pPr algn="l"/>
-            <a:endParaRPr lang="en-US" sz="3200" dirty="0">
-              <a:solidFill>
-                <a:schemeClr val="bg1"/>
-              </a:solidFill>
-              <a:latin typeface="Avenir Medium" panose="02000503020000020003" pitchFamily="2" charset="0"/>
-              <a:ea typeface="Bodoni Ornaments" pitchFamily="2" charset="0"/>
-            </a:endParaRPr>
-          </a:p>
-          <a:p>
-            <a:pPr algn="l"/>
-            <a:r>
-              <a:rPr lang="en-US" sz="3200" dirty="0">
-                <a:solidFill>
-                  <a:srgbClr val="FFFF00"/>
-                </a:solidFill>
-                <a:latin typeface="Avenir Medium" panose="02000503020000020003" pitchFamily="2" charset="0"/>
-                <a:ea typeface="Bodoni Ornaments" pitchFamily="2" charset="0"/>
-              </a:rPr>
-              <a:t>G                  C</a:t>
-            </a:r>
-          </a:p>
-          <a:p>
-            <a:pPr algn="l"/>
-            <a:r>
-              <a:rPr lang="en-US" sz="3200" dirty="0">
-                <a:solidFill>
-                  <a:schemeClr val="bg1"/>
-                </a:solidFill>
-                <a:latin typeface="Avenir Medium" panose="02000503020000020003" pitchFamily="2" charset="0"/>
-                <a:ea typeface="Bodoni Ornaments" pitchFamily="2" charset="0"/>
-              </a:rPr>
-              <a:t>Come live in me </a:t>
-            </a:r>
-          </a:p>
-          <a:p>
-            <a:pPr algn="l"/>
-            <a:r>
-              <a:rPr lang="en-US" sz="3200" dirty="0">
-                <a:solidFill>
-                  <a:srgbClr val="FFFF00"/>
-                </a:solidFill>
-                <a:latin typeface="Avenir Medium" panose="02000503020000020003" pitchFamily="2" charset="0"/>
-                <a:ea typeface="Bodoni Ornaments" pitchFamily="2" charset="0"/>
-              </a:rPr>
-              <a:t>           Am         D</a:t>
-            </a:r>
-          </a:p>
-          <a:p>
-            <a:pPr algn="l"/>
-            <a:r>
-              <a:rPr lang="en-US" sz="3200" dirty="0">
-                <a:solidFill>
-                  <a:schemeClr val="bg1"/>
-                </a:solidFill>
-                <a:latin typeface="Avenir Medium" panose="02000503020000020003" pitchFamily="2" charset="0"/>
-                <a:ea typeface="Bodoni Ornaments" pitchFamily="2" charset="0"/>
-              </a:rPr>
-              <a:t>All my life, take over </a:t>
-            </a:r>
-          </a:p>
-          <a:p>
-            <a:pPr algn="l"/>
-            <a:r>
-              <a:rPr lang="en-US" sz="3200" dirty="0">
-                <a:solidFill>
-                  <a:srgbClr val="FFFF00"/>
-                </a:solidFill>
-                <a:latin typeface="Avenir Medium" panose="02000503020000020003" pitchFamily="2" charset="0"/>
-                <a:ea typeface="Bodoni Ornaments" pitchFamily="2" charset="0"/>
-              </a:rPr>
-              <a:t>G                         C</a:t>
-            </a:r>
-          </a:p>
-          <a:p>
-            <a:pPr algn="l"/>
-            <a:r>
-              <a:rPr lang="en-US" sz="3200" dirty="0">
-                <a:solidFill>
-                  <a:schemeClr val="bg1"/>
-                </a:solidFill>
-                <a:latin typeface="Avenir Medium" panose="02000503020000020003" pitchFamily="2" charset="0"/>
-                <a:ea typeface="Bodoni Ornaments" pitchFamily="2" charset="0"/>
-              </a:rPr>
-              <a:t>Come breathe in me </a:t>
-            </a:r>
-          </a:p>
-          <a:p>
-            <a:pPr algn="l"/>
-            <a:r>
-              <a:rPr lang="en-US" sz="3200" dirty="0">
-                <a:solidFill>
-                  <a:srgbClr val="FFFF00"/>
-                </a:solidFill>
-                <a:latin typeface="Avenir Medium" panose="02000503020000020003" pitchFamily="2" charset="0"/>
-                <a:ea typeface="Bodoni Ornaments" pitchFamily="2" charset="0"/>
-              </a:rPr>
-              <a:t>                Am      D         G</a:t>
-            </a:r>
-          </a:p>
-          <a:p>
-            <a:pPr algn="l"/>
-            <a:r>
-              <a:rPr lang="en-US" sz="3200" dirty="0">
-                <a:solidFill>
-                  <a:schemeClr val="bg1"/>
-                </a:solidFill>
-                <a:latin typeface="Avenir Medium" panose="02000503020000020003" pitchFamily="2" charset="0"/>
-                <a:ea typeface="Bodoni Ornaments" pitchFamily="2" charset="0"/>
-              </a:rPr>
-              <a:t>And I will rise on Eagles Wings </a:t>
-            </a:r>
-          </a:p>
-        </p:txBody>
-      </p:sp>
-    </p:spTree>
-    <p:extLst>
-      <p:ext uri="{BB962C8B-B14F-4D97-AF65-F5344CB8AC3E}">
-        <p14:creationId xmlns:p14="http://schemas.microsoft.com/office/powerpoint/2010/main" val="2418529465"/>
-      </p:ext>
-    </p:extLst>
-  </p:cSld>
-  <p:clrMapOvr>
-    <a:masterClrMapping/>
-  </p:clrMapOvr>
-</p:sld>
-</file>
-
-<file path=ppt/slides/slide15.xml><?xml version="1.0" encoding="utf-8"?>
 <p:sld xmlns:a="http://schemas.openxmlformats.org/drawingml/2006/main" xmlns:r="http://schemas.openxmlformats.org/officeDocument/2006/relationships" xmlns:p="http://schemas.openxmlformats.org/presentationml/2006/main">
   <p:cSld>
     <p:bg>
@@ -5364,7 +5213,7 @@
 </p:sld>
 </file>
 
-<file path=ppt/slides/slide16.xml><?xml version="1.0" encoding="utf-8"?>
+<file path=ppt/slides/slide15.xml><?xml version="1.0" encoding="utf-8"?>
 <p:sld xmlns:a="http://schemas.openxmlformats.org/drawingml/2006/main" xmlns:r="http://schemas.openxmlformats.org/officeDocument/2006/relationships" xmlns:p="http://schemas.openxmlformats.org/presentationml/2006/main">
   <p:cSld>
     <p:bg>
@@ -5424,6 +5273,19 @@
           <a:lstStyle/>
           <a:p>
             <a:pPr algn="l"/>
+            <a:r>
+              <a:rPr lang="en-US" sz="2800" dirty="0">
+                <a:solidFill>
+                  <a:schemeClr val="bg1"/>
+                </a:solidFill>
+                <a:latin typeface="Avenir Medium" panose="02000503020000020003" pitchFamily="2" charset="0"/>
+                <a:ea typeface="Bodoni Ornaments" pitchFamily="2" charset="0"/>
+              </a:rPr>
+              <a:t>CAPO 3rd</a:t>
+            </a:r>
+          </a:p>
+          <a:p>
+            <a:pPr algn="l"/>
             <a:endParaRPr lang="en-US" sz="2800" dirty="0">
               <a:solidFill>
                 <a:schemeClr val="bg1"/>
@@ -5571,7 +5433,7 @@
 </p:sld>
 </file>
 
-<file path=ppt/slides/slide17.xml><?xml version="1.0" encoding="utf-8"?>
+<file path=ppt/slides/slide16.xml><?xml version="1.0" encoding="utf-8"?>
 <p:sld xmlns:a="http://schemas.openxmlformats.org/drawingml/2006/main" xmlns:r="http://schemas.openxmlformats.org/officeDocument/2006/relationships" xmlns:p="http://schemas.openxmlformats.org/presentationml/2006/main">
   <p:cSld>
     <p:bg>
@@ -5732,7 +5594,7 @@
 </p:sld>
 </file>
 
-<file path=ppt/slides/slide18.xml><?xml version="1.0" encoding="utf-8"?>
+<file path=ppt/slides/slide17.xml><?xml version="1.0" encoding="utf-8"?>
 <p:sld xmlns:a="http://schemas.openxmlformats.org/drawingml/2006/main" xmlns:r="http://schemas.openxmlformats.org/officeDocument/2006/relationships" xmlns:p="http://schemas.openxmlformats.org/presentationml/2006/main">
   <p:cSld>
     <p:bg>
@@ -5919,7 +5781,7 @@
 </p:sld>
 </file>
 
-<file path=ppt/slides/slide19.xml><?xml version="1.0" encoding="utf-8"?>
+<file path=ppt/slides/slide18.xml><?xml version="1.0" encoding="utf-8"?>
 <p:sld xmlns:a="http://schemas.openxmlformats.org/drawingml/2006/main" xmlns:r="http://schemas.openxmlformats.org/officeDocument/2006/relationships" xmlns:p="http://schemas.openxmlformats.org/presentationml/2006/main">
   <p:cSld>
     <p:bg>
@@ -6071,6 +5933,193 @@
     <p:extLst>
       <p:ext uri="{BB962C8B-B14F-4D97-AF65-F5344CB8AC3E}">
         <p14:creationId xmlns:p14="http://schemas.microsoft.com/office/powerpoint/2010/main" val="3447987795"/>
+      </p:ext>
+    </p:extLst>
+  </p:cSld>
+  <p:clrMapOvr>
+    <a:masterClrMapping/>
+  </p:clrMapOvr>
+</p:sld>
+</file>
+
+<file path=ppt/slides/slide19.xml><?xml version="1.0" encoding="utf-8"?>
+<p:sld xmlns:a="http://schemas.openxmlformats.org/drawingml/2006/main" xmlns:r="http://schemas.openxmlformats.org/officeDocument/2006/relationships" xmlns:p="http://schemas.openxmlformats.org/presentationml/2006/main">
+  <p:cSld>
+    <p:bg>
+      <p:bgPr>
+        <a:solidFill>
+          <a:schemeClr val="accent1"/>
+        </a:solidFill>
+        <a:effectLst/>
+      </p:bgPr>
+    </p:bg>
+    <p:spTree>
+      <p:nvGrpSpPr>
+        <p:cNvPr id="1" name="">
+          <a:extLst>
+            <a:ext uri="{FF2B5EF4-FFF2-40B4-BE49-F238E27FC236}">
+              <a16:creationId xmlns:a16="http://schemas.microsoft.com/office/drawing/2014/main" id="{5DD33EFA-F7D0-9842-96CE-E6E8E483FE7C}"/>
+            </a:ext>
+          </a:extLst>
+        </p:cNvPr>
+        <p:cNvGrpSpPr/>
+        <p:nvPr/>
+      </p:nvGrpSpPr>
+      <p:grpSpPr>
+        <a:xfrm>
+          <a:off x="0" y="0"/>
+          <a:ext cx="0" cy="0"/>
+          <a:chOff x="0" y="0"/>
+          <a:chExt cx="0" cy="0"/>
+        </a:xfrm>
+      </p:grpSpPr>
+      <p:sp>
+        <p:nvSpPr>
+          <p:cNvPr id="3" name="Subtitle 2">
+            <a:extLst>
+              <a:ext uri="{FF2B5EF4-FFF2-40B4-BE49-F238E27FC236}">
+                <a16:creationId xmlns:a16="http://schemas.microsoft.com/office/drawing/2014/main" id="{FF081542-C896-4EDB-AEF8-63986A716EEF}"/>
+              </a:ext>
+            </a:extLst>
+          </p:cNvPr>
+          <p:cNvSpPr>
+            <a:spLocks noGrp="1"/>
+          </p:cNvSpPr>
+          <p:nvPr>
+            <p:ph type="subTitle" idx="1"/>
+          </p:nvPr>
+        </p:nvSpPr>
+        <p:spPr>
+          <a:xfrm>
+            <a:off x="682831" y="497702"/>
+            <a:ext cx="10826338" cy="5862596"/>
+          </a:xfrm>
+        </p:spPr>
+        <p:txBody>
+          <a:bodyPr>
+            <a:noAutofit/>
+          </a:bodyPr>
+          <a:lstStyle/>
+          <a:p>
+            <a:pPr algn="l"/>
+            <a:endParaRPr lang="en-US" sz="2800" dirty="0">
+              <a:solidFill>
+                <a:schemeClr val="bg1"/>
+              </a:solidFill>
+              <a:latin typeface="Avenir Medium" panose="02000503020000020003" pitchFamily="2" charset="0"/>
+              <a:ea typeface="Bodoni Ornaments" pitchFamily="2" charset="0"/>
+            </a:endParaRPr>
+          </a:p>
+          <a:p>
+            <a:pPr algn="l"/>
+            <a:r>
+              <a:rPr lang="en-US" sz="2800" dirty="0">
+                <a:solidFill>
+                  <a:srgbClr val="FFFF00"/>
+                </a:solidFill>
+                <a:latin typeface="Avenir Medium" panose="02000503020000020003" pitchFamily="2" charset="0"/>
+                <a:ea typeface="Bodoni Ornaments" pitchFamily="2" charset="0"/>
+              </a:rPr>
+              <a:t>      G                                     C  D         G</a:t>
+            </a:r>
+          </a:p>
+          <a:p>
+            <a:pPr algn="l"/>
+            <a:r>
+              <a:rPr lang="en-US" sz="2800" dirty="0">
+                <a:solidFill>
+                  <a:schemeClr val="bg1"/>
+                </a:solidFill>
+                <a:latin typeface="Avenir Medium" panose="02000503020000020003" pitchFamily="2" charset="0"/>
+                <a:ea typeface="Bodoni Ornaments" pitchFamily="2" charset="0"/>
+              </a:rPr>
+              <a:t>My sin - O, the bliss of this glorious thought</a:t>
+            </a:r>
+          </a:p>
+          <a:p>
+            <a:pPr algn="l"/>
+            <a:r>
+              <a:rPr lang="en-US" sz="2800" dirty="0">
+                <a:solidFill>
+                  <a:srgbClr val="FFFF00"/>
+                </a:solidFill>
+                <a:latin typeface="Avenir Medium" panose="02000503020000020003" pitchFamily="2" charset="0"/>
+                <a:ea typeface="Bodoni Ornaments" pitchFamily="2" charset="0"/>
+              </a:rPr>
+              <a:t>      Em             A                  D</a:t>
+            </a:r>
+          </a:p>
+          <a:p>
+            <a:pPr algn="l"/>
+            <a:r>
+              <a:rPr lang="en-US" sz="2800" dirty="0">
+                <a:solidFill>
+                  <a:schemeClr val="bg1"/>
+                </a:solidFill>
+                <a:latin typeface="Avenir Medium" panose="02000503020000020003" pitchFamily="2" charset="0"/>
+                <a:ea typeface="Bodoni Ornaments" pitchFamily="2" charset="0"/>
+              </a:rPr>
+              <a:t>My sin - not in part but the whole</a:t>
+            </a:r>
+          </a:p>
+          <a:p>
+            <a:pPr algn="l"/>
+            <a:r>
+              <a:rPr lang="en-US" sz="2800" dirty="0">
+                <a:solidFill>
+                  <a:srgbClr val="FFFF00"/>
+                </a:solidFill>
+                <a:latin typeface="Avenir Medium" panose="02000503020000020003" pitchFamily="2" charset="0"/>
+                <a:ea typeface="Bodoni Ornaments" pitchFamily="2" charset="0"/>
+              </a:rPr>
+              <a:t>    G                     C              A              D </a:t>
+            </a:r>
+          </a:p>
+          <a:p>
+            <a:pPr algn="l"/>
+            <a:r>
+              <a:rPr lang="en-US" sz="2800" dirty="0">
+                <a:solidFill>
+                  <a:schemeClr val="bg1"/>
+                </a:solidFill>
+                <a:latin typeface="Avenir Medium" panose="02000503020000020003" pitchFamily="2" charset="0"/>
+                <a:ea typeface="Bodoni Ornaments" pitchFamily="2" charset="0"/>
+              </a:rPr>
+              <a:t>Is nailed to the cross and I bear it no more</a:t>
+            </a:r>
+          </a:p>
+          <a:p>
+            <a:pPr algn="l"/>
+            <a:r>
+              <a:rPr lang="en-US" sz="2800" dirty="0">
+                <a:solidFill>
+                  <a:srgbClr val="FFFF00"/>
+                </a:solidFill>
+                <a:latin typeface="Avenir Medium" panose="02000503020000020003" pitchFamily="2" charset="0"/>
+                <a:ea typeface="Bodoni Ornaments" pitchFamily="2" charset="0"/>
+              </a:rPr>
+              <a:t>                 G                          C     D        G</a:t>
+            </a:r>
+          </a:p>
+          <a:p>
+            <a:pPr algn="l"/>
+            <a:r>
+              <a:rPr lang="en-US" sz="2800" dirty="0">
+                <a:solidFill>
+                  <a:schemeClr val="bg1"/>
+                </a:solidFill>
+                <a:latin typeface="Avenir Medium" panose="02000503020000020003" pitchFamily="2" charset="0"/>
+                <a:ea typeface="Bodoni Ornaments" pitchFamily="2" charset="0"/>
+              </a:rPr>
+              <a:t>Praise the Lord, praise the Lord, O my soul</a:t>
+            </a:r>
+          </a:p>
+        </p:txBody>
+      </p:sp>
+    </p:spTree>
+    <p:extLst>
+      <p:ext uri="{BB962C8B-B14F-4D97-AF65-F5344CB8AC3E}">
+        <p14:creationId xmlns:p14="http://schemas.microsoft.com/office/powerpoint/2010/main" val="3555321680"/>
       </p:ext>
     </p:extLst>
   </p:cSld>
@@ -6140,16 +6189,19 @@
           <a:lstStyle/>
           <a:p>
             <a:pPr algn="l"/>
-            <a:endParaRPr lang="en-US" sz="3200" dirty="0">
-              <a:solidFill>
-                <a:schemeClr val="accent1">
-                  <a:lumMod val="40000"/>
-                  <a:lumOff val="60000"/>
-                </a:schemeClr>
-              </a:solidFill>
-              <a:latin typeface="Avenir Medium" panose="02000503020000020003" pitchFamily="2" charset="0"/>
-              <a:ea typeface="Bodoni Ornaments" pitchFamily="2" charset="0"/>
-            </a:endParaRPr>
+            <a:r>
+              <a:rPr lang="en-US" sz="3200" dirty="0">
+                <a:solidFill>
+                  <a:schemeClr val="accent1">
+                    <a:lumMod val="40000"/>
+                    <a:lumOff val="60000"/>
+                  </a:schemeClr>
+                </a:solidFill>
+                <a:latin typeface="Avenir Medium" panose="02000503020000020003" pitchFamily="2" charset="0"/>
+                <a:ea typeface="Bodoni Ornaments" pitchFamily="2" charset="0"/>
+              </a:rPr>
+              <a:t>CAPO 2nd</a:t>
+            </a:r>
           </a:p>
           <a:p>
             <a:pPr algn="l"/>
@@ -6284,193 +6336,6 @@
 </file>
 
 <file path=ppt/slides/slide20.xml><?xml version="1.0" encoding="utf-8"?>
-<p:sld xmlns:a="http://schemas.openxmlformats.org/drawingml/2006/main" xmlns:r="http://schemas.openxmlformats.org/officeDocument/2006/relationships" xmlns:p="http://schemas.openxmlformats.org/presentationml/2006/main">
-  <p:cSld>
-    <p:bg>
-      <p:bgPr>
-        <a:solidFill>
-          <a:schemeClr val="accent1"/>
-        </a:solidFill>
-        <a:effectLst/>
-      </p:bgPr>
-    </p:bg>
-    <p:spTree>
-      <p:nvGrpSpPr>
-        <p:cNvPr id="1" name="">
-          <a:extLst>
-            <a:ext uri="{FF2B5EF4-FFF2-40B4-BE49-F238E27FC236}">
-              <a16:creationId xmlns:a16="http://schemas.microsoft.com/office/drawing/2014/main" id="{5DD33EFA-F7D0-9842-96CE-E6E8E483FE7C}"/>
-            </a:ext>
-          </a:extLst>
-        </p:cNvPr>
-        <p:cNvGrpSpPr/>
-        <p:nvPr/>
-      </p:nvGrpSpPr>
-      <p:grpSpPr>
-        <a:xfrm>
-          <a:off x="0" y="0"/>
-          <a:ext cx="0" cy="0"/>
-          <a:chOff x="0" y="0"/>
-          <a:chExt cx="0" cy="0"/>
-        </a:xfrm>
-      </p:grpSpPr>
-      <p:sp>
-        <p:nvSpPr>
-          <p:cNvPr id="3" name="Subtitle 2">
-            <a:extLst>
-              <a:ext uri="{FF2B5EF4-FFF2-40B4-BE49-F238E27FC236}">
-                <a16:creationId xmlns:a16="http://schemas.microsoft.com/office/drawing/2014/main" id="{FF081542-C896-4EDB-AEF8-63986A716EEF}"/>
-              </a:ext>
-            </a:extLst>
-          </p:cNvPr>
-          <p:cNvSpPr>
-            <a:spLocks noGrp="1"/>
-          </p:cNvSpPr>
-          <p:nvPr>
-            <p:ph type="subTitle" idx="1"/>
-          </p:nvPr>
-        </p:nvSpPr>
-        <p:spPr>
-          <a:xfrm>
-            <a:off x="682831" y="497702"/>
-            <a:ext cx="10826338" cy="5862596"/>
-          </a:xfrm>
-        </p:spPr>
-        <p:txBody>
-          <a:bodyPr>
-            <a:noAutofit/>
-          </a:bodyPr>
-          <a:lstStyle/>
-          <a:p>
-            <a:pPr algn="l"/>
-            <a:endParaRPr lang="en-US" sz="2800" dirty="0">
-              <a:solidFill>
-                <a:schemeClr val="bg1"/>
-              </a:solidFill>
-              <a:latin typeface="Avenir Medium" panose="02000503020000020003" pitchFamily="2" charset="0"/>
-              <a:ea typeface="Bodoni Ornaments" pitchFamily="2" charset="0"/>
-            </a:endParaRPr>
-          </a:p>
-          <a:p>
-            <a:pPr algn="l"/>
-            <a:r>
-              <a:rPr lang="en-US" sz="2800" dirty="0">
-                <a:solidFill>
-                  <a:srgbClr val="FFFF00"/>
-                </a:solidFill>
-                <a:latin typeface="Avenir Medium" panose="02000503020000020003" pitchFamily="2" charset="0"/>
-                <a:ea typeface="Bodoni Ornaments" pitchFamily="2" charset="0"/>
-              </a:rPr>
-              <a:t>      G                                     C  D         G</a:t>
-            </a:r>
-          </a:p>
-          <a:p>
-            <a:pPr algn="l"/>
-            <a:r>
-              <a:rPr lang="en-US" sz="2800" dirty="0">
-                <a:solidFill>
-                  <a:schemeClr val="bg1"/>
-                </a:solidFill>
-                <a:latin typeface="Avenir Medium" panose="02000503020000020003" pitchFamily="2" charset="0"/>
-                <a:ea typeface="Bodoni Ornaments" pitchFamily="2" charset="0"/>
-              </a:rPr>
-              <a:t>My sin - O, the bliss of this glorious thought</a:t>
-            </a:r>
-          </a:p>
-          <a:p>
-            <a:pPr algn="l"/>
-            <a:r>
-              <a:rPr lang="en-US" sz="2800" dirty="0">
-                <a:solidFill>
-                  <a:srgbClr val="FFFF00"/>
-                </a:solidFill>
-                <a:latin typeface="Avenir Medium" panose="02000503020000020003" pitchFamily="2" charset="0"/>
-                <a:ea typeface="Bodoni Ornaments" pitchFamily="2" charset="0"/>
-              </a:rPr>
-              <a:t>      Em             A                  D</a:t>
-            </a:r>
-          </a:p>
-          <a:p>
-            <a:pPr algn="l"/>
-            <a:r>
-              <a:rPr lang="en-US" sz="2800" dirty="0">
-                <a:solidFill>
-                  <a:schemeClr val="bg1"/>
-                </a:solidFill>
-                <a:latin typeface="Avenir Medium" panose="02000503020000020003" pitchFamily="2" charset="0"/>
-                <a:ea typeface="Bodoni Ornaments" pitchFamily="2" charset="0"/>
-              </a:rPr>
-              <a:t>My sin - not in part but the whole</a:t>
-            </a:r>
-          </a:p>
-          <a:p>
-            <a:pPr algn="l"/>
-            <a:r>
-              <a:rPr lang="en-US" sz="2800" dirty="0">
-                <a:solidFill>
-                  <a:srgbClr val="FFFF00"/>
-                </a:solidFill>
-                <a:latin typeface="Avenir Medium" panose="02000503020000020003" pitchFamily="2" charset="0"/>
-                <a:ea typeface="Bodoni Ornaments" pitchFamily="2" charset="0"/>
-              </a:rPr>
-              <a:t>    G                     C              A              D </a:t>
-            </a:r>
-          </a:p>
-          <a:p>
-            <a:pPr algn="l"/>
-            <a:r>
-              <a:rPr lang="en-US" sz="2800" dirty="0">
-                <a:solidFill>
-                  <a:schemeClr val="bg1"/>
-                </a:solidFill>
-                <a:latin typeface="Avenir Medium" panose="02000503020000020003" pitchFamily="2" charset="0"/>
-                <a:ea typeface="Bodoni Ornaments" pitchFamily="2" charset="0"/>
-              </a:rPr>
-              <a:t>Is nailed to the cross and I bear it no more</a:t>
-            </a:r>
-          </a:p>
-          <a:p>
-            <a:pPr algn="l"/>
-            <a:r>
-              <a:rPr lang="en-US" sz="2800" dirty="0">
-                <a:solidFill>
-                  <a:srgbClr val="FFFF00"/>
-                </a:solidFill>
-                <a:latin typeface="Avenir Medium" panose="02000503020000020003" pitchFamily="2" charset="0"/>
-                <a:ea typeface="Bodoni Ornaments" pitchFamily="2" charset="0"/>
-              </a:rPr>
-              <a:t>                 G                          C     D        G</a:t>
-            </a:r>
-          </a:p>
-          <a:p>
-            <a:pPr algn="l"/>
-            <a:r>
-              <a:rPr lang="en-US" sz="2800" dirty="0">
-                <a:solidFill>
-                  <a:schemeClr val="bg1"/>
-                </a:solidFill>
-                <a:latin typeface="Avenir Medium" panose="02000503020000020003" pitchFamily="2" charset="0"/>
-                <a:ea typeface="Bodoni Ornaments" pitchFamily="2" charset="0"/>
-              </a:rPr>
-              <a:t>Praise the Lord, praise the Lord, O my soul</a:t>
-            </a:r>
-          </a:p>
-        </p:txBody>
-      </p:sp>
-    </p:spTree>
-    <p:extLst>
-      <p:ext uri="{BB962C8B-B14F-4D97-AF65-F5344CB8AC3E}">
-        <p14:creationId xmlns:p14="http://schemas.microsoft.com/office/powerpoint/2010/main" val="3555321680"/>
-      </p:ext>
-    </p:extLst>
-  </p:cSld>
-  <p:clrMapOvr>
-    <a:masterClrMapping/>
-  </p:clrMapOvr>
-</p:sld>
-</file>
-
-<file path=ppt/slides/slide21.xml><?xml version="1.0" encoding="utf-8"?>
 <p:sld xmlns:a="http://schemas.openxmlformats.org/drawingml/2006/main" xmlns:r="http://schemas.openxmlformats.org/officeDocument/2006/relationships" xmlns:p="http://schemas.openxmlformats.org/presentationml/2006/main">
   <p:cSld>
     <p:bg>
@@ -6631,7 +6496,7 @@
 </p:sld>
 </file>
 
-<file path=ppt/slides/slide22.xml><?xml version="1.0" encoding="utf-8"?>
+<file path=ppt/slides/slide21.xml><?xml version="1.0" encoding="utf-8"?>
 <p:sld xmlns:a="http://schemas.openxmlformats.org/drawingml/2006/main" xmlns:r="http://schemas.openxmlformats.org/officeDocument/2006/relationships" xmlns:p="http://schemas.openxmlformats.org/presentationml/2006/main">
   <p:cSld>
     <p:bg>
@@ -6818,7 +6683,7 @@
 </p:sld>
 </file>
 
-<file path=ppt/slides/slide23.xml><?xml version="1.0" encoding="utf-8"?>
+<file path=ppt/slides/slide22.xml><?xml version="1.0" encoding="utf-8"?>
 <p:sld xmlns:a="http://schemas.openxmlformats.org/drawingml/2006/main" xmlns:r="http://schemas.openxmlformats.org/officeDocument/2006/relationships" xmlns:p="http://schemas.openxmlformats.org/presentationml/2006/main">
   <p:cSld>
     <p:bg>
@@ -6979,7 +6844,7 @@
 </p:sld>
 </file>
 
-<file path=ppt/slides/slide24.xml><?xml version="1.0" encoding="utf-8"?>
+<file path=ppt/slides/slide23.xml><?xml version="1.0" encoding="utf-8"?>
 <p:sld xmlns:a="http://schemas.openxmlformats.org/drawingml/2006/main" xmlns:r="http://schemas.openxmlformats.org/officeDocument/2006/relationships" xmlns:p="http://schemas.openxmlformats.org/presentationml/2006/main">
   <p:cSld>
     <p:bg>
@@ -7484,7 +7349,7 @@
 </p:sld>
 </file>
 
-<file path=ppt/slides/slide25.xml><?xml version="1.0" encoding="utf-8"?>
+<file path=ppt/slides/slide24.xml><?xml version="1.0" encoding="utf-8"?>
 <p:sld xmlns:a="http://schemas.openxmlformats.org/drawingml/2006/main" xmlns:r="http://schemas.openxmlformats.org/officeDocument/2006/relationships" xmlns:p="http://schemas.openxmlformats.org/presentationml/2006/main">
   <p:cSld>
     <p:bg>
@@ -7721,7 +7586,7 @@
 </p:sld>
 </file>
 
-<file path=ppt/slides/slide26.xml><?xml version="1.0" encoding="utf-8"?>
+<file path=ppt/slides/slide25.xml><?xml version="1.0" encoding="utf-8"?>
 <p:sld xmlns:a="http://schemas.openxmlformats.org/drawingml/2006/main" xmlns:r="http://schemas.openxmlformats.org/officeDocument/2006/relationships" xmlns:p="http://schemas.openxmlformats.org/presentationml/2006/main">
   <p:cSld>
     <p:bg>
@@ -7918,7 +7783,7 @@
 </p:sld>
 </file>
 
-<file path=ppt/slides/slide27.xml><?xml version="1.0" encoding="utf-8"?>
+<file path=ppt/slides/slide26.xml><?xml version="1.0" encoding="utf-8"?>
 <p:sld xmlns:a="http://schemas.openxmlformats.org/drawingml/2006/main" xmlns:r="http://schemas.openxmlformats.org/officeDocument/2006/relationships" xmlns:p="http://schemas.openxmlformats.org/presentationml/2006/main">
   <p:cSld>
     <p:bg>
@@ -8135,7 +8000,7 @@
 </p:sld>
 </file>
 
-<file path=ppt/slides/slide28.xml><?xml version="1.0" encoding="utf-8"?>
+<file path=ppt/slides/slide27.xml><?xml version="1.0" encoding="utf-8"?>
 <p:sld xmlns:a="http://schemas.openxmlformats.org/drawingml/2006/main" xmlns:r="http://schemas.openxmlformats.org/officeDocument/2006/relationships" xmlns:p="http://schemas.openxmlformats.org/presentationml/2006/main">
   <p:cSld>
     <p:bg>
@@ -8332,7 +8197,7 @@
 </p:sld>
 </file>
 
-<file path=ppt/slides/slide29.xml><?xml version="1.0" encoding="utf-8"?>
+<file path=ppt/slides/slide28.xml><?xml version="1.0" encoding="utf-8"?>
 <p:sld xmlns:a="http://schemas.openxmlformats.org/drawingml/2006/main" xmlns:r="http://schemas.openxmlformats.org/officeDocument/2006/relationships" xmlns:p="http://schemas.openxmlformats.org/presentationml/2006/main">
   <p:cSld>
     <p:bg>
@@ -8520,6 +8385,249 @@
     <p:extLst>
       <p:ext uri="{BB962C8B-B14F-4D97-AF65-F5344CB8AC3E}">
         <p14:creationId xmlns:p14="http://schemas.microsoft.com/office/powerpoint/2010/main" val="1098862308"/>
+      </p:ext>
+    </p:extLst>
+  </p:cSld>
+  <p:clrMapOvr>
+    <a:masterClrMapping/>
+  </p:clrMapOvr>
+</p:sld>
+</file>
+
+<file path=ppt/slides/slide29.xml><?xml version="1.0" encoding="utf-8"?>
+<p:sld xmlns:a="http://schemas.openxmlformats.org/drawingml/2006/main" xmlns:r="http://schemas.openxmlformats.org/officeDocument/2006/relationships" xmlns:p="http://schemas.openxmlformats.org/presentationml/2006/main">
+  <p:cSld>
+    <p:bg>
+      <p:bgPr>
+        <a:solidFill>
+          <a:schemeClr val="accent1"/>
+        </a:solidFill>
+        <a:effectLst/>
+      </p:bgPr>
+    </p:bg>
+    <p:spTree>
+      <p:nvGrpSpPr>
+        <p:cNvPr id="1" name="">
+          <a:extLst>
+            <a:ext uri="{FF2B5EF4-FFF2-40B4-BE49-F238E27FC236}">
+              <a16:creationId xmlns:a16="http://schemas.microsoft.com/office/drawing/2014/main" id="{EE1E0E32-01C4-4D80-A2A1-C201A67C4417}"/>
+            </a:ext>
+          </a:extLst>
+        </p:cNvPr>
+        <p:cNvGrpSpPr/>
+        <p:nvPr/>
+      </p:nvGrpSpPr>
+      <p:grpSpPr>
+        <a:xfrm>
+          <a:off x="0" y="0"/>
+          <a:ext cx="0" cy="0"/>
+          <a:chOff x="0" y="0"/>
+          <a:chExt cx="0" cy="0"/>
+        </a:xfrm>
+      </p:grpSpPr>
+      <p:sp>
+        <p:nvSpPr>
+          <p:cNvPr id="3" name="Subtitle 2">
+            <a:extLst>
+              <a:ext uri="{FF2B5EF4-FFF2-40B4-BE49-F238E27FC236}">
+                <a16:creationId xmlns:a16="http://schemas.microsoft.com/office/drawing/2014/main" id="{B65681B1-27E9-A129-5D47-E725637F58DF}"/>
+              </a:ext>
+            </a:extLst>
+          </p:cNvPr>
+          <p:cNvSpPr>
+            <a:spLocks noGrp="1"/>
+          </p:cNvSpPr>
+          <p:nvPr>
+            <p:ph type="subTitle" idx="1"/>
+          </p:nvPr>
+        </p:nvSpPr>
+        <p:spPr>
+          <a:xfrm>
+            <a:off x="682831" y="497702"/>
+            <a:ext cx="10826338" cy="5862596"/>
+          </a:xfrm>
+        </p:spPr>
+        <p:txBody>
+          <a:bodyPr>
+            <a:noAutofit/>
+          </a:bodyPr>
+          <a:lstStyle/>
+          <a:p>
+            <a:pPr algn="l"/>
+            <a:endParaRPr lang="en-US" sz="2800" dirty="0">
+              <a:solidFill>
+                <a:schemeClr val="bg1"/>
+              </a:solidFill>
+              <a:latin typeface="Avenir Medium" panose="02000503020000020003" pitchFamily="2" charset="0"/>
+              <a:ea typeface="Bodoni Ornaments" pitchFamily="2" charset="0"/>
+            </a:endParaRPr>
+          </a:p>
+          <a:p>
+            <a:pPr algn="l"/>
+            <a:r>
+              <a:rPr lang="en-US" sz="2800" dirty="0">
+                <a:solidFill>
+                  <a:srgbClr val="FFFF00"/>
+                </a:solidFill>
+                <a:latin typeface="Avenir Medium" panose="02000503020000020003" pitchFamily="2" charset="0"/>
+                <a:ea typeface="Bodoni Ornaments" pitchFamily="2" charset="0"/>
+              </a:rPr>
+              <a:t>              C          F                    C</a:t>
+            </a:r>
+          </a:p>
+          <a:p>
+            <a:pPr algn="l"/>
+            <a:r>
+              <a:rPr lang="en-US" sz="2800" dirty="0">
+                <a:solidFill>
+                  <a:schemeClr val="bg1"/>
+                </a:solidFill>
+                <a:latin typeface="Avenir Medium" panose="02000503020000020003" pitchFamily="2" charset="0"/>
+                <a:ea typeface="Bodoni Ornaments" pitchFamily="2" charset="0"/>
+              </a:rPr>
+              <a:t>On that day we join the resurrection</a:t>
+            </a:r>
+          </a:p>
+          <a:p>
+            <a:pPr algn="l"/>
+            <a:r>
+              <a:rPr lang="en-US" sz="2800" dirty="0">
+                <a:solidFill>
+                  <a:srgbClr val="FFFF00"/>
+                </a:solidFill>
+                <a:latin typeface="Avenir Medium" panose="02000503020000020003" pitchFamily="2" charset="0"/>
+                <a:ea typeface="Bodoni Ornaments" pitchFamily="2" charset="0"/>
+              </a:rPr>
+              <a:t>                  Am            F                     G</a:t>
+            </a:r>
+          </a:p>
+          <a:p>
+            <a:pPr algn="l"/>
+            <a:r>
+              <a:rPr lang="en-US" sz="2800" dirty="0">
+                <a:solidFill>
+                  <a:schemeClr val="bg1"/>
+                </a:solidFill>
+                <a:latin typeface="Avenir Medium" panose="02000503020000020003" pitchFamily="2" charset="0"/>
+                <a:ea typeface="Bodoni Ornaments" pitchFamily="2" charset="0"/>
+              </a:rPr>
+              <a:t>And stand beside the heroes of the faith</a:t>
+            </a:r>
+          </a:p>
+          <a:p>
+            <a:pPr algn="l"/>
+            <a:r>
+              <a:rPr lang="en-US" sz="2800" dirty="0">
+                <a:solidFill>
+                  <a:srgbClr val="FFFF00"/>
+                </a:solidFill>
+                <a:latin typeface="Avenir Medium" panose="02000503020000020003" pitchFamily="2" charset="0"/>
+                <a:ea typeface="Bodoni Ornaments" pitchFamily="2" charset="0"/>
+              </a:rPr>
+              <a:t>                C                 F                C      G   Am</a:t>
+            </a:r>
+          </a:p>
+          <a:p>
+            <a:pPr algn="l"/>
+            <a:r>
+              <a:rPr lang="en-US" sz="2800" dirty="0">
+                <a:solidFill>
+                  <a:schemeClr val="bg1"/>
+                </a:solidFill>
+                <a:latin typeface="Avenir Medium" panose="02000503020000020003" pitchFamily="2" charset="0"/>
+                <a:ea typeface="Bodoni Ornaments" pitchFamily="2" charset="0"/>
+              </a:rPr>
+              <a:t>With one voice a thousand generations</a:t>
+            </a:r>
+          </a:p>
+          <a:p>
+            <a:pPr algn="l"/>
+            <a:r>
+              <a:rPr lang="en-US" sz="2800" dirty="0">
+                <a:solidFill>
+                  <a:srgbClr val="FFFF00"/>
+                </a:solidFill>
+                <a:latin typeface="Avenir Medium" panose="02000503020000020003" pitchFamily="2" charset="0"/>
+                <a:ea typeface="Bodoni Ornaments" pitchFamily="2" charset="0"/>
+              </a:rPr>
+              <a:t>          F                    G                       C      </a:t>
+            </a:r>
+          </a:p>
+          <a:p>
+            <a:pPr algn="l"/>
+            <a:r>
+              <a:rPr lang="en-US" sz="2800" dirty="0">
+                <a:solidFill>
+                  <a:schemeClr val="bg1"/>
+                </a:solidFill>
+                <a:latin typeface="Avenir Medium" panose="02000503020000020003" pitchFamily="2" charset="0"/>
+                <a:ea typeface="Bodoni Ornaments" pitchFamily="2" charset="0"/>
+              </a:rPr>
+              <a:t>Sing “worthy is the Lamb who was slain”</a:t>
+            </a:r>
+          </a:p>
+          <a:p>
+            <a:pPr algn="l"/>
+            <a:r>
+              <a:rPr lang="en-US" sz="2800" dirty="0">
+                <a:solidFill>
+                  <a:srgbClr val="FFFF00"/>
+                </a:solidFill>
+                <a:latin typeface="Avenir Medium" panose="02000503020000020003" pitchFamily="2" charset="0"/>
+                <a:ea typeface="Bodoni Ornaments" pitchFamily="2" charset="0"/>
+              </a:rPr>
+              <a:t>        F      G                C      </a:t>
+            </a:r>
+            <a:r>
+              <a:rPr lang="en-US" sz="2800" dirty="0" err="1">
+                <a:solidFill>
+                  <a:srgbClr val="FFFF00"/>
+                </a:solidFill>
+                <a:latin typeface="Avenir Medium" panose="02000503020000020003" pitchFamily="2" charset="0"/>
+                <a:ea typeface="Bodoni Ornaments" pitchFamily="2" charset="0"/>
+              </a:rPr>
+              <a:t>Csus</a:t>
+            </a:r>
+            <a:r>
+              <a:rPr lang="en-US" sz="2800" dirty="0">
+                <a:solidFill>
+                  <a:srgbClr val="FFFF00"/>
+                </a:solidFill>
+                <a:latin typeface="Avenir Medium" panose="02000503020000020003" pitchFamily="2" charset="0"/>
+                <a:ea typeface="Bodoni Ornaments" pitchFamily="2" charset="0"/>
+              </a:rPr>
+              <a:t>  C</a:t>
+            </a:r>
+          </a:p>
+          <a:p>
+            <a:pPr algn="l"/>
+            <a:r>
+              <a:rPr lang="en-US" sz="2800" dirty="0">
+                <a:solidFill>
+                  <a:schemeClr val="bg1"/>
+                </a:solidFill>
+                <a:latin typeface="Avenir Medium" panose="02000503020000020003" pitchFamily="2" charset="0"/>
+                <a:ea typeface="Bodoni Ornaments" pitchFamily="2" charset="0"/>
+              </a:rPr>
+              <a:t>“Forever He shall reign”</a:t>
+            </a:r>
+          </a:p>
+          <a:p>
+            <a:pPr algn="l"/>
+            <a:endParaRPr lang="en-US" sz="2800" dirty="0">
+              <a:solidFill>
+                <a:schemeClr val="bg1"/>
+              </a:solidFill>
+              <a:latin typeface="Avenir Medium" panose="02000503020000020003" pitchFamily="2" charset="0"/>
+              <a:ea typeface="Bodoni Ornaments" pitchFamily="2" charset="0"/>
+            </a:endParaRPr>
+          </a:p>
+        </p:txBody>
+      </p:sp>
+    </p:spTree>
+    <p:extLst>
+      <p:ext uri="{BB962C8B-B14F-4D97-AF65-F5344CB8AC3E}">
+        <p14:creationId xmlns:p14="http://schemas.microsoft.com/office/powerpoint/2010/main" val="1997286391"/>
       </p:ext>
     </p:extLst>
   </p:cSld>
@@ -8766,249 +8874,6 @@
     <p:bg>
       <p:bgPr>
         <a:solidFill>
-          <a:schemeClr val="accent1"/>
-        </a:solidFill>
-        <a:effectLst/>
-      </p:bgPr>
-    </p:bg>
-    <p:spTree>
-      <p:nvGrpSpPr>
-        <p:cNvPr id="1" name="">
-          <a:extLst>
-            <a:ext uri="{FF2B5EF4-FFF2-40B4-BE49-F238E27FC236}">
-              <a16:creationId xmlns:a16="http://schemas.microsoft.com/office/drawing/2014/main" id="{EE1E0E32-01C4-4D80-A2A1-C201A67C4417}"/>
-            </a:ext>
-          </a:extLst>
-        </p:cNvPr>
-        <p:cNvGrpSpPr/>
-        <p:nvPr/>
-      </p:nvGrpSpPr>
-      <p:grpSpPr>
-        <a:xfrm>
-          <a:off x="0" y="0"/>
-          <a:ext cx="0" cy="0"/>
-          <a:chOff x="0" y="0"/>
-          <a:chExt cx="0" cy="0"/>
-        </a:xfrm>
-      </p:grpSpPr>
-      <p:sp>
-        <p:nvSpPr>
-          <p:cNvPr id="3" name="Subtitle 2">
-            <a:extLst>
-              <a:ext uri="{FF2B5EF4-FFF2-40B4-BE49-F238E27FC236}">
-                <a16:creationId xmlns:a16="http://schemas.microsoft.com/office/drawing/2014/main" id="{B65681B1-27E9-A129-5D47-E725637F58DF}"/>
-              </a:ext>
-            </a:extLst>
-          </p:cNvPr>
-          <p:cNvSpPr>
-            <a:spLocks noGrp="1"/>
-          </p:cNvSpPr>
-          <p:nvPr>
-            <p:ph type="subTitle" idx="1"/>
-          </p:nvPr>
-        </p:nvSpPr>
-        <p:spPr>
-          <a:xfrm>
-            <a:off x="682831" y="497702"/>
-            <a:ext cx="10826338" cy="5862596"/>
-          </a:xfrm>
-        </p:spPr>
-        <p:txBody>
-          <a:bodyPr>
-            <a:noAutofit/>
-          </a:bodyPr>
-          <a:lstStyle/>
-          <a:p>
-            <a:pPr algn="l"/>
-            <a:endParaRPr lang="en-US" sz="2800" dirty="0">
-              <a:solidFill>
-                <a:schemeClr val="bg1"/>
-              </a:solidFill>
-              <a:latin typeface="Avenir Medium" panose="02000503020000020003" pitchFamily="2" charset="0"/>
-              <a:ea typeface="Bodoni Ornaments" pitchFamily="2" charset="0"/>
-            </a:endParaRPr>
-          </a:p>
-          <a:p>
-            <a:pPr algn="l"/>
-            <a:r>
-              <a:rPr lang="en-US" sz="2800" dirty="0">
-                <a:solidFill>
-                  <a:srgbClr val="FFFF00"/>
-                </a:solidFill>
-                <a:latin typeface="Avenir Medium" panose="02000503020000020003" pitchFamily="2" charset="0"/>
-                <a:ea typeface="Bodoni Ornaments" pitchFamily="2" charset="0"/>
-              </a:rPr>
-              <a:t>              C          F                    C</a:t>
-            </a:r>
-          </a:p>
-          <a:p>
-            <a:pPr algn="l"/>
-            <a:r>
-              <a:rPr lang="en-US" sz="2800" dirty="0">
-                <a:solidFill>
-                  <a:schemeClr val="bg1"/>
-                </a:solidFill>
-                <a:latin typeface="Avenir Medium" panose="02000503020000020003" pitchFamily="2" charset="0"/>
-                <a:ea typeface="Bodoni Ornaments" pitchFamily="2" charset="0"/>
-              </a:rPr>
-              <a:t>On that day we join the resurrection</a:t>
-            </a:r>
-          </a:p>
-          <a:p>
-            <a:pPr algn="l"/>
-            <a:r>
-              <a:rPr lang="en-US" sz="2800" dirty="0">
-                <a:solidFill>
-                  <a:srgbClr val="FFFF00"/>
-                </a:solidFill>
-                <a:latin typeface="Avenir Medium" panose="02000503020000020003" pitchFamily="2" charset="0"/>
-                <a:ea typeface="Bodoni Ornaments" pitchFamily="2" charset="0"/>
-              </a:rPr>
-              <a:t>                  Am            F                     G</a:t>
-            </a:r>
-          </a:p>
-          <a:p>
-            <a:pPr algn="l"/>
-            <a:r>
-              <a:rPr lang="en-US" sz="2800" dirty="0">
-                <a:solidFill>
-                  <a:schemeClr val="bg1"/>
-                </a:solidFill>
-                <a:latin typeface="Avenir Medium" panose="02000503020000020003" pitchFamily="2" charset="0"/>
-                <a:ea typeface="Bodoni Ornaments" pitchFamily="2" charset="0"/>
-              </a:rPr>
-              <a:t>And stand beside the heroes of the faith</a:t>
-            </a:r>
-          </a:p>
-          <a:p>
-            <a:pPr algn="l"/>
-            <a:r>
-              <a:rPr lang="en-US" sz="2800" dirty="0">
-                <a:solidFill>
-                  <a:srgbClr val="FFFF00"/>
-                </a:solidFill>
-                <a:latin typeface="Avenir Medium" panose="02000503020000020003" pitchFamily="2" charset="0"/>
-                <a:ea typeface="Bodoni Ornaments" pitchFamily="2" charset="0"/>
-              </a:rPr>
-              <a:t>                C                 F                C      G   Am</a:t>
-            </a:r>
-          </a:p>
-          <a:p>
-            <a:pPr algn="l"/>
-            <a:r>
-              <a:rPr lang="en-US" sz="2800" dirty="0">
-                <a:solidFill>
-                  <a:schemeClr val="bg1"/>
-                </a:solidFill>
-                <a:latin typeface="Avenir Medium" panose="02000503020000020003" pitchFamily="2" charset="0"/>
-                <a:ea typeface="Bodoni Ornaments" pitchFamily="2" charset="0"/>
-              </a:rPr>
-              <a:t>With one voice a thousand generations</a:t>
-            </a:r>
-          </a:p>
-          <a:p>
-            <a:pPr algn="l"/>
-            <a:r>
-              <a:rPr lang="en-US" sz="2800" dirty="0">
-                <a:solidFill>
-                  <a:srgbClr val="FFFF00"/>
-                </a:solidFill>
-                <a:latin typeface="Avenir Medium" panose="02000503020000020003" pitchFamily="2" charset="0"/>
-                <a:ea typeface="Bodoni Ornaments" pitchFamily="2" charset="0"/>
-              </a:rPr>
-              <a:t>          F                    G                       C      </a:t>
-            </a:r>
-          </a:p>
-          <a:p>
-            <a:pPr algn="l"/>
-            <a:r>
-              <a:rPr lang="en-US" sz="2800" dirty="0">
-                <a:solidFill>
-                  <a:schemeClr val="bg1"/>
-                </a:solidFill>
-                <a:latin typeface="Avenir Medium" panose="02000503020000020003" pitchFamily="2" charset="0"/>
-                <a:ea typeface="Bodoni Ornaments" pitchFamily="2" charset="0"/>
-              </a:rPr>
-              <a:t>Sing “worthy is the Lamb who was slain”</a:t>
-            </a:r>
-          </a:p>
-          <a:p>
-            <a:pPr algn="l"/>
-            <a:r>
-              <a:rPr lang="en-US" sz="2800" dirty="0">
-                <a:solidFill>
-                  <a:srgbClr val="FFFF00"/>
-                </a:solidFill>
-                <a:latin typeface="Avenir Medium" panose="02000503020000020003" pitchFamily="2" charset="0"/>
-                <a:ea typeface="Bodoni Ornaments" pitchFamily="2" charset="0"/>
-              </a:rPr>
-              <a:t>        F      G                C      </a:t>
-            </a:r>
-            <a:r>
-              <a:rPr lang="en-US" sz="2800" dirty="0" err="1">
-                <a:solidFill>
-                  <a:srgbClr val="FFFF00"/>
-                </a:solidFill>
-                <a:latin typeface="Avenir Medium" panose="02000503020000020003" pitchFamily="2" charset="0"/>
-                <a:ea typeface="Bodoni Ornaments" pitchFamily="2" charset="0"/>
-              </a:rPr>
-              <a:t>Csus</a:t>
-            </a:r>
-            <a:r>
-              <a:rPr lang="en-US" sz="2800" dirty="0">
-                <a:solidFill>
-                  <a:srgbClr val="FFFF00"/>
-                </a:solidFill>
-                <a:latin typeface="Avenir Medium" panose="02000503020000020003" pitchFamily="2" charset="0"/>
-                <a:ea typeface="Bodoni Ornaments" pitchFamily="2" charset="0"/>
-              </a:rPr>
-              <a:t>  C</a:t>
-            </a:r>
-          </a:p>
-          <a:p>
-            <a:pPr algn="l"/>
-            <a:r>
-              <a:rPr lang="en-US" sz="2800" dirty="0">
-                <a:solidFill>
-                  <a:schemeClr val="bg1"/>
-                </a:solidFill>
-                <a:latin typeface="Avenir Medium" panose="02000503020000020003" pitchFamily="2" charset="0"/>
-                <a:ea typeface="Bodoni Ornaments" pitchFamily="2" charset="0"/>
-              </a:rPr>
-              <a:t>“Forever He shall reign”</a:t>
-            </a:r>
-          </a:p>
-          <a:p>
-            <a:pPr algn="l"/>
-            <a:endParaRPr lang="en-US" sz="2800" dirty="0">
-              <a:solidFill>
-                <a:schemeClr val="bg1"/>
-              </a:solidFill>
-              <a:latin typeface="Avenir Medium" panose="02000503020000020003" pitchFamily="2" charset="0"/>
-              <a:ea typeface="Bodoni Ornaments" pitchFamily="2" charset="0"/>
-            </a:endParaRPr>
-          </a:p>
-        </p:txBody>
-      </p:sp>
-    </p:spTree>
-    <p:extLst>
-      <p:ext uri="{BB962C8B-B14F-4D97-AF65-F5344CB8AC3E}">
-        <p14:creationId xmlns:p14="http://schemas.microsoft.com/office/powerpoint/2010/main" val="1997286391"/>
-      </p:ext>
-    </p:extLst>
-  </p:cSld>
-  <p:clrMapOvr>
-    <a:masterClrMapping/>
-  </p:clrMapOvr>
-</p:sld>
-</file>
-
-<file path=ppt/slides/slide31.xml><?xml version="1.0" encoding="utf-8"?>
-<p:sld xmlns:a="http://schemas.openxmlformats.org/drawingml/2006/main" xmlns:r="http://schemas.openxmlformats.org/officeDocument/2006/relationships" xmlns:p="http://schemas.openxmlformats.org/presentationml/2006/main">
-  <p:cSld>
-    <p:bg>
-      <p:bgPr>
-        <a:solidFill>
           <a:srgbClr val="7030A0"/>
         </a:solidFill>
         <a:effectLst/>
@@ -9200,7 +9065,7 @@
 </p:sld>
 </file>
 
-<file path=ppt/slides/slide32.xml><?xml version="1.0" encoding="utf-8"?>
+<file path=ppt/slides/slide31.xml><?xml version="1.0" encoding="utf-8"?>
 <p:sld xmlns:a="http://schemas.openxmlformats.org/drawingml/2006/main" xmlns:r="http://schemas.openxmlformats.org/officeDocument/2006/relationships" xmlns:p="http://schemas.openxmlformats.org/presentationml/2006/main">
   <p:cSld>
     <p:bg>
@@ -9250,7 +9115,7 @@
         <p:spPr>
           <a:xfrm>
             <a:off x="682831" y="497702"/>
-            <a:ext cx="10826338" cy="5862596"/>
+            <a:ext cx="8739465" cy="5862596"/>
           </a:xfrm>
         </p:spPr>
         <p:txBody>
@@ -9450,6 +9315,45 @@
               <a:latin typeface="Avenir Medium" panose="02000503020000020003" pitchFamily="2" charset="0"/>
               <a:ea typeface="Bodoni Ornaments" pitchFamily="2" charset="0"/>
             </a:endParaRPr>
+          </a:p>
+        </p:txBody>
+      </p:sp>
+      <p:sp>
+        <p:nvSpPr>
+          <p:cNvPr id="2" name="TextBox 1">
+            <a:extLst>
+              <a:ext uri="{FF2B5EF4-FFF2-40B4-BE49-F238E27FC236}">
+                <a16:creationId xmlns:a16="http://schemas.microsoft.com/office/drawing/2014/main" id="{E75DA90B-8E2F-5FC7-6D23-E70DA53C90F6}"/>
+              </a:ext>
+            </a:extLst>
+          </p:cNvPr>
+          <p:cNvSpPr txBox="1"/>
+          <p:nvPr/>
+        </p:nvSpPr>
+        <p:spPr>
+          <a:xfrm>
+            <a:off x="10416209" y="5830957"/>
+            <a:ext cx="1284326" cy="769441"/>
+          </a:xfrm>
+          <a:prstGeom prst="rect">
+            <a:avLst/>
+          </a:prstGeom>
+          <a:noFill/>
+        </p:spPr>
+        <p:txBody>
+          <a:bodyPr wrap="none" rtlCol="0">
+            <a:spAutoFit/>
+          </a:bodyPr>
+          <a:lstStyle/>
+          <a:p>
+            <a:r>
+              <a:rPr lang="en-US" sz="4400" dirty="0">
+                <a:solidFill>
+                  <a:schemeClr val="bg1"/>
+                </a:solidFill>
+              </a:rPr>
+              <a:t>END</a:t>
+            </a:r>
           </a:p>
         </p:txBody>
       </p:sp>
@@ -9466,7 +9370,7 @@
 </p:sld>
 </file>
 
-<file path=ppt/slides/slide33.xml><?xml version="1.0" encoding="utf-8"?>
+<file path=ppt/slides/slide32.xml><?xml version="1.0" encoding="utf-8"?>
 <p:sld xmlns:a="http://schemas.openxmlformats.org/drawingml/2006/main" xmlns:r="http://schemas.openxmlformats.org/officeDocument/2006/relationships" xmlns:p="http://schemas.openxmlformats.org/presentationml/2006/main">
   <p:cSld>
     <p:bg>
@@ -10070,7 +9974,7 @@
 </p:sld>
 </file>
 
-<file path=ppt/slides/slide34.xml><?xml version="1.0" encoding="utf-8"?>
+<file path=ppt/slides/slide33.xml><?xml version="1.0" encoding="utf-8"?>
 <p:sld xmlns:a="http://schemas.openxmlformats.org/drawingml/2006/main" xmlns:r="http://schemas.openxmlformats.org/officeDocument/2006/relationships" xmlns:p="http://schemas.openxmlformats.org/presentationml/2006/main">
   <p:cSld>
     <p:bg>
@@ -10257,7 +10161,7 @@
 </p:sld>
 </file>
 
-<file path=ppt/slides/slide35.xml><?xml version="1.0" encoding="utf-8"?>
+<file path=ppt/slides/slide34.xml><?xml version="1.0" encoding="utf-8"?>
 <p:sld xmlns:a="http://schemas.openxmlformats.org/drawingml/2006/main" xmlns:r="http://schemas.openxmlformats.org/officeDocument/2006/relationships" xmlns:p="http://schemas.openxmlformats.org/presentationml/2006/main">
   <p:cSld>
     <p:bg>
@@ -10454,7 +10358,7 @@
 </p:sld>
 </file>
 
-<file path=ppt/slides/slide36.xml><?xml version="1.0" encoding="utf-8"?>
+<file path=ppt/slides/slide35.xml><?xml version="1.0" encoding="utf-8"?>
 <p:sld xmlns:a="http://schemas.openxmlformats.org/drawingml/2006/main" xmlns:r="http://schemas.openxmlformats.org/officeDocument/2006/relationships" xmlns:p="http://schemas.openxmlformats.org/presentationml/2006/main">
   <p:cSld>
     <p:bg>
@@ -10641,7 +10545,7 @@
 </p:sld>
 </file>
 
-<file path=ppt/slides/slide37.xml><?xml version="1.0" encoding="utf-8"?>
+<file path=ppt/slides/slide36.xml><?xml version="1.0" encoding="utf-8"?>
 <p:sld xmlns:a="http://schemas.openxmlformats.org/drawingml/2006/main" xmlns:r="http://schemas.openxmlformats.org/officeDocument/2006/relationships" xmlns:p="http://schemas.openxmlformats.org/presentationml/2006/main">
   <p:cSld>
     <p:bg>
